--- a/presentations/GridWeave_Review2.pptx
+++ b/presentations/GridWeave_Review2.pptx
@@ -3007,7 +3007,7 @@
                 </a:solidFill>
                 <a:latin typeface="Calibri"/>
               </a:rPr>
-              <a:t>581 tests by workstream (all passing)</a:t>
+              <a:t>581 tests by component (all passing)</a:t>
             </a:r>
           </a:p>
         </c:rich>
@@ -3074,16 +3074,16 @@
                 <c:ptCount val="4"/>
                 <c:lvl>
                   <c:pt idx="0">
-                    <c:v>P1 buildings + contracts</c:v>
+                    <c:v>Buildings + contracts</c:v>
                   </c:pt>
                   <c:pt idx="1">
-                    <c:v>P4 coordination</c:v>
+                    <c:v>Coordination</c:v>
                   </c:pt>
                   <c:pt idx="2">
-                    <c:v>P3 supply</c:v>
+                    <c:v>Supply</c:v>
                   </c:pt>
                   <c:pt idx="3">
-                    <c:v>P2 market</c:v>
+                    <c:v>Market</c:v>
                   </c:pt>
                 </c:lvl>
               </c:multiLvlStrCache>
@@ -4286,7 +4286,7 @@
                 </a:solidFill>
                 <a:latin typeface="Calibri"/>
               </a:rPr>
-              <a:t>Full system (all four workstreams): ms per simulated slot vs buildings</a:t>
+              <a:t>Full system (all agents + market): ms per simulated slot vs buildings</a:t>
             </a:r>
           </a:p>
         </c:rich>
@@ -5165,7 +5165,7 @@
           <a:p>
             <a:r>
               <a:rPr lang="en-US" dirty="0"/>
-              <a:t>The dependency direction is one-way: every workstream depends on the shared models and protocols, never on each other.</a:t>
+              <a:t>The dependency direction is one-way: every sub-package depends on the shared models and protocols, never on each other.</a:t>
             </a:r>
             <a:endParaRPr lang="en-US" dirty="0"/>
           </a:p>
@@ -7040,7 +7040,7 @@
                 <a:ea typeface="Calibri" pitchFamily="34" charset="-122"/>
                 <a:cs typeface="Calibri" pitchFamily="34" charset="-120"/>
               </a:rPr>
-              <a:t>One package, four owned sub-packages, one set of shared contracts</a:t>
+              <a:t>One package, four sub-packages, one set of shared contracts</a:t>
             </a:r>
             <a:endParaRPr lang="en-US" sz="1400" dirty="0"/>
           </a:p>
@@ -7250,7 +7250,7 @@
                 <a:ea typeface="Calibri" pitchFamily="34" charset="-122"/>
                 <a:cs typeface="Calibri" pitchFamily="34" charset="-120"/>
               </a:rPr>
-              <a:t>P1 building intelligence</a:t>
+              <a:t>Building agents: forecasting, bids, settlement</a:t>
             </a:r>
             <a:endParaRPr lang="en-US" sz="1200" dirty="0"/>
           </a:p>
@@ -7355,7 +7355,7 @@
                 <a:ea typeface="Calibri" pitchFamily="34" charset="-122"/>
                 <a:cs typeface="Calibri" pitchFamily="34" charset="-120"/>
               </a:rPr>
-              <a:t>P2 market mechanism</a:t>
+              <a:t>Market mechanism</a:t>
             </a:r>
             <a:endParaRPr lang="en-US" sz="1200" dirty="0"/>
           </a:p>
@@ -7460,7 +7460,7 @@
                 <a:ea typeface="Calibri" pitchFamily="34" charset="-122"/>
                 <a:cs typeface="Calibri" pitchFamily="34" charset="-120"/>
               </a:rPr>
-              <a:t>P3 grid, solar, battery</a:t>
+              <a:t>Grid, solar and battery agents</a:t>
             </a:r>
             <a:endParaRPr lang="en-US" sz="1200" dirty="0"/>
           </a:p>
@@ -7565,7 +7565,7 @@
                 <a:ea typeface="Calibri" pitchFamily="34" charset="-122"/>
                 <a:cs typeface="Calibri" pitchFamily="34" charset="-120"/>
               </a:rPr>
-              <a:t>P4 loop, scenarios, modes, dashboard</a:t>
+              <a:t>Coordination loop, scenarios, modes, dashboard</a:t>
             </a:r>
             <a:endParaRPr lang="en-US" sz="1200" dirty="0"/>
           </a:p>
@@ -8319,7 +8319,7 @@
                 <a:ea typeface="Calibri" pitchFamily="34" charset="-122"/>
                 <a:cs typeface="Calibri" pitchFamily="34" charset="-120"/>
               </a:rPr>
-              <a:t>Four workstreams interacting through validated protocols in a closed 15-minute loop</a:t>
+              <a:t>Four agent types interacting through validated protocols in a closed 15-minute loop</a:t>
             </a:r>
             <a:endParaRPr lang="en-US" sz="1600" dirty="0"/>
           </a:p>
@@ -13477,7 +13477,7 @@
                           <a:ea typeface="Calibri" pitchFamily="34" charset="-122"/>
                           <a:cs typeface="Calibri" pitchFamily="34" charset="-120"/>
                         </a:rPr>
-                        <a:t>Building agent (P1)</a:t>
+                        <a:t>Building agent</a:t>
                       </a:r>
                       <a:endParaRPr lang="en-US" sz="1250" dirty="0">
                         <a:latin typeface="Calibri" charset="0"/>
@@ -13683,7 +13683,7 @@
                           <a:ea typeface="Calibri" pitchFamily="34" charset="-122"/>
                           <a:cs typeface="Calibri" pitchFamily="34" charset="-120"/>
                         </a:rPr>
-                        <a:t>Market engine (P2)</a:t>
+                        <a:t>Market engine</a:t>
                       </a:r>
                       <a:endParaRPr lang="en-US" sz="1250" dirty="0">
                         <a:latin typeface="Calibri" charset="0"/>
@@ -13889,7 +13889,7 @@
                           <a:ea typeface="Calibri" pitchFamily="34" charset="-122"/>
                           <a:cs typeface="Calibri" pitchFamily="34" charset="-120"/>
                         </a:rPr>
-                        <a:t>Grid + Solar + Battery (P3)</a:t>
+                        <a:t>Grid + Solar + Battery</a:t>
                       </a:r>
                       <a:endParaRPr lang="en-US" sz="1250" dirty="0">
                         <a:latin typeface="Calibri" charset="0"/>
@@ -14095,7 +14095,7 @@
                           <a:ea typeface="Calibri" pitchFamily="34" charset="-122"/>
                           <a:cs typeface="Calibri" pitchFamily="34" charset="-120"/>
                         </a:rPr>
-                        <a:t>Coordinator's campus (P4)</a:t>
+                        <a:t>Coordinator's campus</a:t>
                       </a:r>
                       <a:endParaRPr lang="en-US" sz="1250" dirty="0">
                         <a:latin typeface="Calibri" charset="0"/>
